--- a/MCG_Marketecture_Agentic.pptx
+++ b/MCG_Marketecture_Agentic.pptx
@@ -503,7 +503,7 @@
             <a:r>
               <a:rPr lang="en-US" dirty="0"/>
               <a:t>TALK TRACK · 60 SECONDS
-Meridian Commerce Group runs on three systems that never talked: a PostgreSQL warehouse database, cold-chain IoT through Kafka, and Salesforce. Agentic Data Engineering changes how that data is built and governed.
+Meridian Commerce Group runs on three systems that never talked: a PostgreSQL warehouse database, cold-chain IoT through Kafka, and Meridian CRM. Agentic Data Engineering changes how that data is built and governed.
 The pipeline is code. Two declarative Qlik Talend Cloud projects — six tasks across batch and streaming — are version-controlled YAML that lands and transforms every feed in the Open Lakehouse. The same definition is editable three ways: visually in the UI, programmatically in VS Code, or agentically with an AI coding agent that reads the schema, generates the change, and hands it back for a one-line git review.
 On top of the lakehouse, conversational agents do the governance work — a Data Product Agent to package the two gold products, a Data Quality Agent to define and run rules with a steward, and a Catalog and Business Glossary Agent to generate draft glossary terms for human review. These are Qlik Answers capabilities, not separate products. Inside the pipeline tasks, Talend Agentic Routes add LLM calls and RAG; the Qlik MCP Server then exposes the governed data products, quality, and lineage to any MCP-compatible AI assistant.
 The result is a path from raw data to a trusted, AI-ready data product that keeps human expertise in the loop at every step. (Declarative pipelines and the Qlik MCP Server are Qlik internal preview, June 2026 — positioned as forward-looking.)</a:t>
@@ -1949,7 +1949,7 @@
                 <a:ea typeface="Inter" pitchFamily="34" charset="-122"/>
                 <a:cs typeface="Inter" pitchFamily="34" charset="-120"/>
               </a:rPr>
-              <a:t>Salesforce CRM</a:t>
+              <a:t>Meridian CRM</a:t>
             </a:r>
             <a:endParaRPr lang="en-US" sz="1200" dirty="0"/>
           </a:p>
@@ -2066,7 +2066,7 @@
                 <a:ea typeface="Inter" pitchFamily="34" charset="-122"/>
                 <a:cs typeface="Inter" pitchFamily="34" charset="-120"/>
               </a:rPr>
-              <a:t>Every 15 min</a:t>
+              <a:t>MySQL CDC</a:t>
             </a:r>
             <a:endParaRPr lang="en-US" sz="850" dirty="0"/>
           </a:p>
@@ -2218,7 +2218,7 @@
                 <a:ea typeface="Inter" pitchFamily="34" charset="-122"/>
                 <a:cs typeface="Inter" pitchFamily="34" charset="-120"/>
               </a:rPr>
-              <a:t>Salesforce objects</a:t>
+              <a:t>CRM tables</a:t>
             </a:r>
             <a:endParaRPr lang="en-US" sz="900" dirty="0"/>
           </a:p>
@@ -2296,7 +2296,7 @@
                 <a:ea typeface="Inter" pitchFamily="34" charset="-122"/>
                 <a:cs typeface="Inter" pitchFamily="34" charset="-120"/>
               </a:rPr>
-              <a:t>Every 15 min</a:t>
+              <a:t>MySQL CDC</a:t>
             </a:r>
             <a:endParaRPr lang="en-US" sz="850" dirty="0"/>
           </a:p>
@@ -2951,7 +2951,7 @@
                 <a:ea typeface="Inter" pitchFamily="34" charset="-122"/>
                 <a:cs typeface="Inter" pitchFamily="34" charset="-120"/>
               </a:rPr>
-              <a:t>ONE STORE, AUTHORED AS CODE</a:t>
+              <a:t>ONE STORE, AS CODE</a:t>
             </a:r>
             <a:endParaRPr lang="en-US" sz="900" dirty="0"/>
           </a:p>
@@ -4306,7 +4306,7 @@
                 <a:ea typeface="Inter" pitchFamily="34" charset="-122"/>
                 <a:cs typeface="Inter" pitchFamily="34" charset="-120"/>
               </a:rPr>
-              <a:t>governed lakehouse data</a:t>
+              <a:t>governed lakehouse</a:t>
             </a:r>
             <a:endParaRPr lang="en-US" sz="900" dirty="0"/>
           </a:p>
@@ -4357,7 +4357,7 @@
                 <a:ea typeface="Inter" pitchFamily="34" charset="-122"/>
                 <a:cs typeface="Inter" pitchFamily="34" charset="-120"/>
               </a:rPr>
-              <a:t>agent drafts, engineer reviews</a:t>
+              <a:t>agent drafts, you OK</a:t>
             </a:r>
             <a:endParaRPr lang="en-US" sz="900" dirty="0"/>
           </a:p>
